--- a/final-version-doc/files/2_Defense_Presentation.pptx
+++ b/final-version-doc/files/2_Defense_Presentation.pptx
@@ -20561,7 +20561,7 @@
               <a:buNone/>
             </a:pPr>
             <a:r>
-              <a:rPr lang="en-US" sz="5600" b="1" dirty="0">
+              <a:rPr lang="en-US" sz="4200" b="1" dirty="0">
                 <a:solidFill>
                   <a:srgbClr val="00C9B7"/>
                 </a:solidFill>
@@ -20710,7 +20710,7 @@
               <a:buNone/>
             </a:pPr>
             <a:r>
-              <a:rPr lang="en-US" sz="5600" b="1" dirty="0">
+              <a:rPr lang="en-US" sz="4200" b="1" dirty="0">
                 <a:solidFill>
                   <a:srgbClr val="00C9B7"/>
                 </a:solidFill>
@@ -20859,7 +20859,7 @@
               <a:buNone/>
             </a:pPr>
             <a:r>
-              <a:rPr lang="en-US" sz="5600" b="1" dirty="0">
+              <a:rPr lang="en-US" sz="4200" b="1" dirty="0">
                 <a:solidFill>
                   <a:srgbClr val="00C9B7"/>
                 </a:solidFill>
@@ -21008,7 +21008,7 @@
               <a:buNone/>
             </a:pPr>
             <a:r>
-              <a:rPr lang="en-US" sz="5600" b="1" dirty="0">
+              <a:rPr lang="en-US" sz="4200" b="1" dirty="0">
                 <a:solidFill>
                   <a:srgbClr val="00C9B7"/>
                 </a:solidFill>

--- a/final-version-doc/files/2_Defense_Presentation.pptx
+++ b/final-version-doc/files/2_Defense_Presentation.pptx
@@ -3208,13 +3208,13 @@
               </a:spcAft>
             </a:pPr>
             <a:r>
-              <a:rPr sz="3000" b="1">
+              <a:rPr sz="2600" b="1">
                 <a:solidFill>
                   <a:srgbClr val="065A82"/>
                 </a:solidFill>
                 <a:latin typeface="Calibri"/>
               </a:rPr>
-              <a:t>38×</a:t>
+              <a:t>0% → 38.3%</a:t>
             </a:r>
           </a:p>
           <a:p>
@@ -3233,7 +3233,7 @@
                 </a:solidFill>
                 <a:latin typeface="Calibri"/>
               </a:rPr>
-              <a:t>spread in failure rate between projects</a:t>
+              <a:t>the full range of failure rate across the 18 projects</a:t>
             </a:r>
           </a:p>
           <a:p>
@@ -3252,7 +3252,7 @@
                 </a:solidFill>
                 <a:latin typeface="Calibri"/>
               </a:rPr>
-              <a:t>0.0% at elastic/elasticsearch — 600 runs, not one failure. 38.3% at prisma/prisma.</a:t>
+              <a:t>elastic/elasticsearch: 600 runs, not one failure. prisma/prisma: 230 of 600. Elevenfold spread across the seventeen that fail at all.</a:t>
             </a:r>
           </a:p>
         </p:txBody>
@@ -11523,7 +11523,7 @@
                 <a:ea typeface="Calibri" pitchFamily="34" charset="-122"/>
                 <a:cs typeface="Calibri" pitchFamily="34" charset="-120"/>
               </a:rPr>
-              <a:t>this system is largely a project-level risk estimator, not a commit-level one. Failure rates vary 38-fold across the eighteen projects, and Elasticsearch contributes 600 runs with zero failures.</a:t>
+              <a:t>this system is largely a project-level risk estimator, not a commit-level one. Failure rates run from 0.0% to 38.3% across the eighteen projects — elevenfold across the seventeen that fail at all — and Elasticsearch contributes 600 runs with zero failures.</a:t>
             </a:r>
             <a:endParaRPr lang="en-US" sz="1400" dirty="0"/>
           </a:p>

--- a/final-version-doc/files/2_Defense_Presentation.pptx
+++ b/final-version-doc/files/2_Defense_Presentation.pptx
@@ -4240,7 +4240,7 @@
                 <a:ea typeface="Consolas" pitchFamily="34" charset="-122"/>
                 <a:cs typeface="Consolas" pitchFamily="34" charset="-120"/>
               </a:rPr>
-              <a:t>lines_added</a:t>
+              <a:t>log_lines_added</a:t>
             </a:r>
             <a:endParaRPr lang="en-US" sz="1050" dirty="0"/>
           </a:p>
@@ -4258,7 +4258,7 @@
                 <a:ea typeface="Consolas" pitchFamily="34" charset="-122"/>
                 <a:cs typeface="Consolas" pitchFamily="34" charset="-120"/>
               </a:rPr>
-              <a:t>lines_deleted</a:t>
+              <a:t>log_lines_deleted</a:t>
             </a:r>
             <a:endParaRPr lang="en-US" sz="1050" dirty="0"/>
           </a:p>
@@ -4276,7 +4276,7 @@
                 <a:ea typeface="Consolas" pitchFamily="34" charset="-122"/>
                 <a:cs typeface="Consolas" pitchFamily="34" charset="-120"/>
               </a:rPr>
-              <a:t>files_changed</a:t>
+              <a:t>log_files_changed</a:t>
             </a:r>
             <a:endParaRPr lang="en-US" sz="1050" dirty="0"/>
           </a:p>
@@ -4294,7 +4294,7 @@
                 <a:ea typeface="Consolas" pitchFamily="34" charset="-122"/>
                 <a:cs typeface="Consolas" pitchFamily="34" charset="-120"/>
               </a:rPr>
-              <a:t>commit_age_days</a:t>
+              <a:t>commit_message_length</a:t>
             </a:r>
             <a:endParaRPr lang="en-US" sz="1050" dirty="0"/>
           </a:p>
@@ -4312,7 +4312,7 @@
                 <a:ea typeface="Consolas" pitchFamily="34" charset="-122"/>
                 <a:cs typeface="Consolas" pitchFamily="34" charset="-120"/>
               </a:rPr>
-              <a:t>message_length</a:t>
+              <a:t>avg_lines_per_file</a:t>
             </a:r>
             <a:endParaRPr lang="en-US" sz="1050" dirty="0"/>
           </a:p>
@@ -4960,7 +4960,7 @@
                 <a:ea typeface="Consolas" pitchFamily="34" charset="-122"/>
                 <a:cs typeface="Consolas" pitchFamily="34" charset="-120"/>
               </a:rPr>
-              <a:t>is_weekend</a:t>
+              <a:t>is_large_commit</a:t>
             </a:r>
             <a:endParaRPr lang="en-US" sz="1050" dirty="0"/>
           </a:p>
@@ -4978,7 +4978,7 @@
                 <a:ea typeface="Consolas" pitchFamily="34" charset="-122"/>
                 <a:cs typeface="Consolas" pitchFamily="34" charset="-120"/>
               </a:rPr>
-              <a:t>is_night_commit</a:t>
+              <a:t>is_many_files</a:t>
             </a:r>
             <a:endParaRPr lang="en-US" sz="1050" dirty="0"/>
           </a:p>
@@ -4996,7 +4996,7 @@
                 <a:ea typeface="Consolas" pitchFamily="34" charset="-122"/>
                 <a:cs typeface="Consolas" pitchFamily="34" charset="-120"/>
               </a:rPr>
-              <a:t>is_pr_merge</a:t>
+              <a:t>is_weekend_commit</a:t>
             </a:r>
             <a:endParaRPr lang="en-US" sz="1050" dirty="0"/>
           </a:p>
@@ -5014,7 +5014,7 @@
                 <a:ea typeface="Consolas" pitchFamily="34" charset="-122"/>
                 <a:cs typeface="Consolas" pitchFamily="34" charset="-120"/>
               </a:rPr>
-              <a:t>is_main_branch</a:t>
+              <a:t>is_off_hours_commit</a:t>
             </a:r>
             <a:endParaRPr lang="en-US" sz="1050" dirty="0"/>
           </a:p>
@@ -5032,7 +5032,7 @@
                 <a:ea typeface="Consolas" pitchFamily="34" charset="-122"/>
                 <a:cs typeface="Consolas" pitchFamily="34" charset="-120"/>
               </a:rPr>
-              <a:t>is_force_push</a:t>
+              <a:t>is_bot_author</a:t>
             </a:r>
             <a:endParaRPr lang="en-US" sz="1050" dirty="0"/>
           </a:p>
@@ -5050,7 +5050,7 @@
                 <a:ea typeface="Consolas" pitchFamily="34" charset="-122"/>
                 <a:cs typeface="Consolas" pitchFamily="34" charset="-120"/>
               </a:rPr>
-              <a:t>is_dependabot</a:t>
+              <a:t>was_truncated</a:t>
             </a:r>
             <a:endParaRPr lang="en-US" sz="1050" dirty="0"/>
           </a:p>
@@ -5347,7 +5347,7 @@
                 <a:ea typeface="Consolas" pitchFamily="34" charset="-122"/>
                 <a:cs typeface="Consolas" pitchFamily="34" charset="-120"/>
               </a:rPr>
-              <a:t>cleaned commit message</a:t>
+              <a:t>commit_message_clean</a:t>
             </a:r>
             <a:endParaRPr lang="en-US" sz="1050" dirty="0"/>
           </a:p>

--- a/final-version-doc/files/2_Defense_Presentation.pptx
+++ b/final-version-doc/files/2_Defense_Presentation.pptx
@@ -10388,7 +10388,504 @@
         </p:nvSpPr>
         <p:spPr>
           <a:xfrm>
-            <a:off x="457200" y="2560320"/>
+            <a:off x="457200" y="3063240"/>
+            <a:ext cx="2926080" cy="502920"/>
+          </a:xfrm>
+          <a:prstGeom prst="rect">
+            <a:avLst/>
+          </a:prstGeom>
+          <a:solidFill>
+            <a:srgbClr val="FFFFFF"/>
+          </a:solidFill>
+          <a:ln w="6350">
+            <a:solidFill>
+              <a:srgbClr val="D0D5DD"/>
+            </a:solidFill>
+            <a:prstDash val="solid"/>
+          </a:ln>
+        </p:spPr>
+        <p:txBody>
+          <a:bodyPr/>
+          <a:lstStyle/>
+          <a:p>
+            <a:endParaRPr lang="en-US"/>
+          </a:p>
+        </p:txBody>
+      </p:sp>
+      <p:sp>
+        <p:nvSpPr>
+          <p:cNvPr id="33" name="Text 31"/>
+          <p:cNvSpPr/>
+          <p:nvPr/>
+        </p:nvSpPr>
+        <p:spPr>
+          <a:xfrm>
+            <a:off x="457200" y="3063240"/>
+            <a:ext cx="2926080" cy="502920"/>
+          </a:xfrm>
+          <a:prstGeom prst="rect">
+            <a:avLst/>
+          </a:prstGeom>
+          <a:noFill/>
+          <a:ln/>
+        </p:spPr>
+        <p:txBody>
+          <a:bodyPr wrap="square" lIns="0" tIns="0" rIns="0" bIns="0" rtlCol="0" anchor="ctr"/>
+          <a:lstStyle/>
+          <a:p>
+            <a:pPr marL="0" indent="0" algn="ctr">
+              <a:buNone/>
+            </a:pPr>
+            <a:r>
+              <a:rPr lang="en-US" sz="1300" b="1" dirty="0">
+                <a:solidFill>
+                  <a:srgbClr val="1A1F2E"/>
+                </a:solidFill>
+                <a:latin typeface="Calibri" pitchFamily="34" charset="0"/>
+                <a:ea typeface="Calibri" pitchFamily="34" charset="-122"/>
+                <a:cs typeface="Calibri" pitchFamily="34" charset="-120"/>
+              </a:rPr>
+              <a:t>Hybrid (full)</a:t>
+            </a:r>
+            <a:endParaRPr lang="en-US" sz="1300" dirty="0"/>
+          </a:p>
+        </p:txBody>
+      </p:sp>
+      <p:sp>
+        <p:nvSpPr>
+          <p:cNvPr id="34" name="Shape 32"/>
+          <p:cNvSpPr/>
+          <p:nvPr/>
+        </p:nvSpPr>
+        <p:spPr>
+          <a:xfrm>
+            <a:off x="3383280" y="3063240"/>
+            <a:ext cx="1280160" cy="502920"/>
+          </a:xfrm>
+          <a:prstGeom prst="rect">
+            <a:avLst/>
+          </a:prstGeom>
+          <a:solidFill>
+            <a:srgbClr val="FFFFFF"/>
+          </a:solidFill>
+          <a:ln w="6350">
+            <a:solidFill>
+              <a:srgbClr val="D0D5DD"/>
+            </a:solidFill>
+            <a:prstDash val="solid"/>
+          </a:ln>
+        </p:spPr>
+        <p:txBody>
+          <a:bodyPr/>
+          <a:lstStyle/>
+          <a:p>
+            <a:endParaRPr lang="en-US"/>
+          </a:p>
+        </p:txBody>
+      </p:sp>
+      <p:sp>
+        <p:nvSpPr>
+          <p:cNvPr id="35" name="Text 33"/>
+          <p:cNvSpPr/>
+          <p:nvPr/>
+        </p:nvSpPr>
+        <p:spPr>
+          <a:xfrm>
+            <a:off x="3383280" y="3063240"/>
+            <a:ext cx="1280160" cy="502920"/>
+          </a:xfrm>
+          <a:prstGeom prst="rect">
+            <a:avLst/>
+          </a:prstGeom>
+          <a:noFill/>
+          <a:ln/>
+        </p:spPr>
+        <p:txBody>
+          <a:bodyPr wrap="square" lIns="0" tIns="0" rIns="0" bIns="0" rtlCol="0" anchor="ctr"/>
+          <a:lstStyle/>
+          <a:p>
+            <a:pPr marL="0" indent="0" algn="ctr">
+              <a:buNone/>
+            </a:pPr>
+            <a:r>
+              <a:rPr lang="en-US" sz="1300" dirty="0">
+                <a:solidFill>
+                  <a:srgbClr val="1A1F2E"/>
+                </a:solidFill>
+                <a:latin typeface="Consolas" pitchFamily="34" charset="0"/>
+                <a:ea typeface="Consolas" pitchFamily="34" charset="-122"/>
+                <a:cs typeface="Consolas" pitchFamily="34" charset="-120"/>
+              </a:rPr>
+              <a:t>0.422</a:t>
+            </a:r>
+            <a:endParaRPr lang="en-US" sz="1300" dirty="0"/>
+          </a:p>
+        </p:txBody>
+      </p:sp>
+      <p:sp>
+        <p:nvSpPr>
+          <p:cNvPr id="36" name="Shape 34"/>
+          <p:cNvSpPr/>
+          <p:nvPr/>
+        </p:nvSpPr>
+        <p:spPr>
+          <a:xfrm>
+            <a:off x="4663440" y="3063240"/>
+            <a:ext cx="1280160" cy="502920"/>
+          </a:xfrm>
+          <a:prstGeom prst="rect">
+            <a:avLst/>
+          </a:prstGeom>
+          <a:solidFill>
+            <a:srgbClr val="FFFFFF"/>
+          </a:solidFill>
+          <a:ln w="6350">
+            <a:solidFill>
+              <a:srgbClr val="D0D5DD"/>
+            </a:solidFill>
+            <a:prstDash val="solid"/>
+          </a:ln>
+        </p:spPr>
+        <p:txBody>
+          <a:bodyPr/>
+          <a:lstStyle/>
+          <a:p>
+            <a:endParaRPr lang="en-US"/>
+          </a:p>
+        </p:txBody>
+      </p:sp>
+      <p:sp>
+        <p:nvSpPr>
+          <p:cNvPr id="37" name="Text 35"/>
+          <p:cNvSpPr/>
+          <p:nvPr/>
+        </p:nvSpPr>
+        <p:spPr>
+          <a:xfrm>
+            <a:off x="4663440" y="3063240"/>
+            <a:ext cx="1280160" cy="502920"/>
+          </a:xfrm>
+          <a:prstGeom prst="rect">
+            <a:avLst/>
+          </a:prstGeom>
+          <a:noFill/>
+          <a:ln/>
+        </p:spPr>
+        <p:txBody>
+          <a:bodyPr wrap="square" lIns="0" tIns="0" rIns="0" bIns="0" rtlCol="0" anchor="ctr"/>
+          <a:lstStyle/>
+          <a:p>
+            <a:pPr marL="0" indent="0" algn="ctr">
+              <a:buNone/>
+            </a:pPr>
+            <a:r>
+              <a:rPr lang="en-US" sz="1300" dirty="0">
+                <a:solidFill>
+                  <a:srgbClr val="1A1F2E"/>
+                </a:solidFill>
+                <a:latin typeface="Consolas" pitchFamily="34" charset="0"/>
+                <a:ea typeface="Consolas" pitchFamily="34" charset="-122"/>
+                <a:cs typeface="Consolas" pitchFamily="34" charset="-120"/>
+              </a:rPr>
+              <a:t>0.064</a:t>
+            </a:r>
+            <a:endParaRPr lang="en-US" sz="1300" dirty="0"/>
+          </a:p>
+        </p:txBody>
+      </p:sp>
+      <p:sp>
+        <p:nvSpPr>
+          <p:cNvPr id="38" name="Shape 36"/>
+          <p:cNvSpPr/>
+          <p:nvPr/>
+        </p:nvSpPr>
+        <p:spPr>
+          <a:xfrm>
+            <a:off x="5943600" y="3063240"/>
+            <a:ext cx="1280160" cy="502920"/>
+          </a:xfrm>
+          <a:prstGeom prst="rect">
+            <a:avLst/>
+          </a:prstGeom>
+          <a:solidFill>
+            <a:srgbClr val="FFFFFF"/>
+          </a:solidFill>
+          <a:ln w="6350">
+            <a:solidFill>
+              <a:srgbClr val="D0D5DD"/>
+            </a:solidFill>
+            <a:prstDash val="solid"/>
+          </a:ln>
+        </p:spPr>
+        <p:txBody>
+          <a:bodyPr/>
+          <a:lstStyle/>
+          <a:p>
+            <a:endParaRPr lang="en-US"/>
+          </a:p>
+        </p:txBody>
+      </p:sp>
+      <p:sp>
+        <p:nvSpPr>
+          <p:cNvPr id="39" name="Text 37"/>
+          <p:cNvSpPr/>
+          <p:nvPr/>
+        </p:nvSpPr>
+        <p:spPr>
+          <a:xfrm>
+            <a:off x="5943600" y="3063240"/>
+            <a:ext cx="1280160" cy="502920"/>
+          </a:xfrm>
+          <a:prstGeom prst="rect">
+            <a:avLst/>
+          </a:prstGeom>
+          <a:noFill/>
+          <a:ln/>
+        </p:spPr>
+        <p:txBody>
+          <a:bodyPr wrap="square" lIns="0" tIns="0" rIns="0" bIns="0" rtlCol="0" anchor="ctr"/>
+          <a:lstStyle/>
+          <a:p>
+            <a:pPr marL="0" indent="0" algn="ctr">
+              <a:buNone/>
+            </a:pPr>
+            <a:r>
+              <a:rPr lang="en-US" sz="1300" dirty="0">
+                <a:solidFill>
+                  <a:srgbClr val="1A1F2E"/>
+                </a:solidFill>
+                <a:latin typeface="Consolas" pitchFamily="34" charset="0"/>
+                <a:ea typeface="Consolas" pitchFamily="34" charset="-122"/>
+                <a:cs typeface="Consolas" pitchFamily="34" charset="-120"/>
+              </a:rPr>
+              <a:t>0.520</a:t>
+            </a:r>
+            <a:endParaRPr lang="en-US" sz="1300" dirty="0"/>
+          </a:p>
+        </p:txBody>
+      </p:sp>
+      <p:sp>
+        <p:nvSpPr>
+          <p:cNvPr id="40" name="Shape 38"/>
+          <p:cNvSpPr/>
+          <p:nvPr/>
+        </p:nvSpPr>
+        <p:spPr>
+          <a:xfrm>
+            <a:off x="7223760" y="3063240"/>
+            <a:ext cx="1280160" cy="502920"/>
+          </a:xfrm>
+          <a:prstGeom prst="rect">
+            <a:avLst/>
+          </a:prstGeom>
+          <a:solidFill>
+            <a:srgbClr val="FFFFFF"/>
+          </a:solidFill>
+          <a:ln w="6350">
+            <a:solidFill>
+              <a:srgbClr val="D0D5DD"/>
+            </a:solidFill>
+            <a:prstDash val="solid"/>
+          </a:ln>
+        </p:spPr>
+        <p:txBody>
+          <a:bodyPr/>
+          <a:lstStyle/>
+          <a:p>
+            <a:endParaRPr lang="en-US"/>
+          </a:p>
+        </p:txBody>
+      </p:sp>
+      <p:sp>
+        <p:nvSpPr>
+          <p:cNvPr id="41" name="Text 39"/>
+          <p:cNvSpPr/>
+          <p:nvPr/>
+        </p:nvSpPr>
+        <p:spPr>
+          <a:xfrm>
+            <a:off x="7223760" y="3063240"/>
+            <a:ext cx="1280160" cy="502920"/>
+          </a:xfrm>
+          <a:prstGeom prst="rect">
+            <a:avLst/>
+          </a:prstGeom>
+          <a:noFill/>
+          <a:ln/>
+        </p:spPr>
+        <p:txBody>
+          <a:bodyPr wrap="square" lIns="0" tIns="0" rIns="0" bIns="0" rtlCol="0" anchor="ctr"/>
+          <a:lstStyle/>
+          <a:p>
+            <a:pPr marL="0" indent="0" algn="ctr">
+              <a:buNone/>
+            </a:pPr>
+            <a:r>
+              <a:rPr lang="en-US" sz="1300" dirty="0">
+                <a:solidFill>
+                  <a:srgbClr val="1A1F2E"/>
+                </a:solidFill>
+                <a:latin typeface="Consolas" pitchFamily="34" charset="0"/>
+                <a:ea typeface="Consolas" pitchFamily="34" charset="-122"/>
+                <a:cs typeface="Consolas" pitchFamily="34" charset="-120"/>
+              </a:rPr>
+              <a:t>0.369</a:t>
+            </a:r>
+            <a:endParaRPr lang="en-US" sz="1300" dirty="0"/>
+          </a:p>
+        </p:txBody>
+      </p:sp>
+      <p:sp>
+        <p:nvSpPr>
+          <p:cNvPr id="42" name="Shape 40"/>
+          <p:cNvSpPr/>
+          <p:nvPr/>
+        </p:nvSpPr>
+        <p:spPr>
+          <a:xfrm>
+            <a:off x="8503920" y="3063240"/>
+            <a:ext cx="1280160" cy="502920"/>
+          </a:xfrm>
+          <a:prstGeom prst="rect">
+            <a:avLst/>
+          </a:prstGeom>
+          <a:solidFill>
+            <a:srgbClr val="FFFFFF"/>
+          </a:solidFill>
+          <a:ln w="6350">
+            <a:solidFill>
+              <a:srgbClr val="D0D5DD"/>
+            </a:solidFill>
+            <a:prstDash val="solid"/>
+          </a:ln>
+        </p:spPr>
+        <p:txBody>
+          <a:bodyPr/>
+          <a:lstStyle/>
+          <a:p>
+            <a:endParaRPr lang="en-US"/>
+          </a:p>
+        </p:txBody>
+      </p:sp>
+      <p:sp>
+        <p:nvSpPr>
+          <p:cNvPr id="43" name="Text 41"/>
+          <p:cNvSpPr/>
+          <p:nvPr/>
+        </p:nvSpPr>
+        <p:spPr>
+          <a:xfrm>
+            <a:off x="8503920" y="3063240"/>
+            <a:ext cx="1280160" cy="502920"/>
+          </a:xfrm>
+          <a:prstGeom prst="rect">
+            <a:avLst/>
+          </a:prstGeom>
+          <a:noFill/>
+          <a:ln/>
+        </p:spPr>
+        <p:txBody>
+          <a:bodyPr wrap="square" lIns="0" tIns="0" rIns="0" bIns="0" rtlCol="0" anchor="ctr"/>
+          <a:lstStyle/>
+          <a:p>
+            <a:pPr marL="0" indent="0" algn="ctr">
+              <a:buNone/>
+            </a:pPr>
+            <a:r>
+              <a:rPr lang="en-US" sz="1300" dirty="0">
+                <a:solidFill>
+                  <a:srgbClr val="1A1F2E"/>
+                </a:solidFill>
+                <a:latin typeface="Consolas" pitchFamily="34" charset="0"/>
+                <a:ea typeface="Consolas" pitchFamily="34" charset="-122"/>
+                <a:cs typeface="Consolas" pitchFamily="34" charset="-120"/>
+              </a:rPr>
+              <a:t>0.480</a:t>
+            </a:r>
+            <a:endParaRPr lang="en-US" sz="1300" dirty="0"/>
+          </a:p>
+        </p:txBody>
+      </p:sp>
+      <p:sp>
+        <p:nvSpPr>
+          <p:cNvPr id="44" name="Shape 42"/>
+          <p:cNvSpPr/>
+          <p:nvPr/>
+        </p:nvSpPr>
+        <p:spPr>
+          <a:xfrm>
+            <a:off x="9784080" y="3063240"/>
+            <a:ext cx="1371600" cy="502920"/>
+          </a:xfrm>
+          <a:prstGeom prst="rect">
+            <a:avLst/>
+          </a:prstGeom>
+          <a:solidFill>
+            <a:srgbClr val="FFFFFF"/>
+          </a:solidFill>
+          <a:ln w="6350">
+            <a:solidFill>
+              <a:srgbClr val="D0D5DD"/>
+            </a:solidFill>
+            <a:prstDash val="solid"/>
+          </a:ln>
+        </p:spPr>
+        <p:txBody>
+          <a:bodyPr/>
+          <a:lstStyle/>
+          <a:p>
+            <a:endParaRPr lang="en-US"/>
+          </a:p>
+        </p:txBody>
+      </p:sp>
+      <p:sp>
+        <p:nvSpPr>
+          <p:cNvPr id="45" name="Text 43"/>
+          <p:cNvSpPr/>
+          <p:nvPr/>
+        </p:nvSpPr>
+        <p:spPr>
+          <a:xfrm>
+            <a:off x="9784080" y="3063240"/>
+            <a:ext cx="1371600" cy="502920"/>
+          </a:xfrm>
+          <a:prstGeom prst="rect">
+            <a:avLst/>
+          </a:prstGeom>
+          <a:noFill/>
+          <a:ln/>
+        </p:spPr>
+        <p:txBody>
+          <a:bodyPr wrap="square" lIns="0" tIns="0" rIns="0" bIns="0" rtlCol="0" anchor="ctr"/>
+          <a:lstStyle/>
+          <a:p>
+            <a:pPr marL="0" indent="0" algn="ctr">
+              <a:buNone/>
+            </a:pPr>
+            <a:r>
+              <a:rPr lang="en-US" sz="1300" dirty="0">
+                <a:solidFill>
+                  <a:srgbClr val="1A1F2E"/>
+                </a:solidFill>
+                <a:latin typeface="Consolas" pitchFamily="34" charset="0"/>
+                <a:ea typeface="Consolas" pitchFamily="34" charset="-122"/>
+                <a:cs typeface="Consolas" pitchFamily="34" charset="-120"/>
+              </a:rPr>
+              <a:t>0.824</a:t>
+            </a:r>
+            <a:endParaRPr lang="en-US" sz="1300" dirty="0"/>
+          </a:p>
+        </p:txBody>
+      </p:sp>
+      <p:sp>
+        <p:nvSpPr>
+          <p:cNvPr id="46" name="Shape 44"/>
+          <p:cNvSpPr/>
+          <p:nvPr/>
+        </p:nvSpPr>
+        <p:spPr>
+          <a:xfrm>
+            <a:off x="457200" y="3566160"/>
             <a:ext cx="2926080" cy="502920"/>
           </a:xfrm>
           <a:prstGeom prst="rect">
@@ -10414,13 +10911,13 @@
       </p:sp>
       <p:sp>
         <p:nvSpPr>
-          <p:cNvPr id="33" name="Text 31"/>
-          <p:cNvSpPr/>
-          <p:nvPr/>
-        </p:nvSpPr>
-        <p:spPr>
-          <a:xfrm>
-            <a:off x="457200" y="2560320"/>
+          <p:cNvPr id="47" name="Text 45"/>
+          <p:cNvSpPr/>
+          <p:nvPr/>
+        </p:nvSpPr>
+        <p:spPr>
+          <a:xfrm>
+            <a:off x="457200" y="3566160"/>
             <a:ext cx="2926080" cy="502920"/>
           </a:xfrm>
           <a:prstGeom prst="rect">
@@ -10445,7 +10942,7 @@
                 <a:ea typeface="Calibri" pitchFamily="34" charset="-122"/>
                 <a:cs typeface="Calibri" pitchFamily="34" charset="-120"/>
               </a:rPr>
-              <a:t>Hybrid (full)</a:t>
+              <a:t>Categorical only</a:t>
             </a:r>
             <a:endParaRPr lang="en-US" sz="1300" dirty="0"/>
           </a:p>
@@ -10453,13 +10950,13 @@
       </p:sp>
       <p:sp>
         <p:nvSpPr>
-          <p:cNvPr id="34" name="Shape 32"/>
-          <p:cNvSpPr/>
-          <p:nvPr/>
-        </p:nvSpPr>
-        <p:spPr>
-          <a:xfrm>
-            <a:off x="3383280" y="2560320"/>
+          <p:cNvPr id="48" name="Shape 46"/>
+          <p:cNvSpPr/>
+          <p:nvPr/>
+        </p:nvSpPr>
+        <p:spPr>
+          <a:xfrm>
+            <a:off x="3383280" y="3566160"/>
             <a:ext cx="1280160" cy="502920"/>
           </a:xfrm>
           <a:prstGeom prst="rect">
@@ -10485,13 +10982,13 @@
       </p:sp>
       <p:sp>
         <p:nvSpPr>
-          <p:cNvPr id="35" name="Text 33"/>
-          <p:cNvSpPr/>
-          <p:nvPr/>
-        </p:nvSpPr>
-        <p:spPr>
-          <a:xfrm>
-            <a:off x="3383280" y="2560320"/>
+          <p:cNvPr id="49" name="Text 47"/>
+          <p:cNvSpPr/>
+          <p:nvPr/>
+        </p:nvSpPr>
+        <p:spPr>
+          <a:xfrm>
+            <a:off x="3383280" y="3566160"/>
             <a:ext cx="1280160" cy="502920"/>
           </a:xfrm>
           <a:prstGeom prst="rect">
@@ -10516,7 +11013,7 @@
                 <a:ea typeface="Consolas" pitchFamily="34" charset="-122"/>
                 <a:cs typeface="Consolas" pitchFamily="34" charset="-120"/>
               </a:rPr>
-              <a:t>0.422</a:t>
+              <a:t>0.481</a:t>
             </a:r>
             <a:endParaRPr lang="en-US" sz="1300" dirty="0"/>
           </a:p>
@@ -10524,13 +11021,13 @@
       </p:sp>
       <p:sp>
         <p:nvSpPr>
-          <p:cNvPr id="36" name="Shape 34"/>
-          <p:cNvSpPr/>
-          <p:nvPr/>
-        </p:nvSpPr>
-        <p:spPr>
-          <a:xfrm>
-            <a:off x="4663440" y="2560320"/>
+          <p:cNvPr id="50" name="Shape 48"/>
+          <p:cNvSpPr/>
+          <p:nvPr/>
+        </p:nvSpPr>
+        <p:spPr>
+          <a:xfrm>
+            <a:off x="4663440" y="3566160"/>
             <a:ext cx="1280160" cy="502920"/>
           </a:xfrm>
           <a:prstGeom prst="rect">
@@ -10556,13 +11053,13 @@
       </p:sp>
       <p:sp>
         <p:nvSpPr>
-          <p:cNvPr id="37" name="Text 35"/>
-          <p:cNvSpPr/>
-          <p:nvPr/>
-        </p:nvSpPr>
-        <p:spPr>
-          <a:xfrm>
-            <a:off x="4663440" y="2560320"/>
+          <p:cNvPr id="51" name="Text 49"/>
+          <p:cNvSpPr/>
+          <p:nvPr/>
+        </p:nvSpPr>
+        <p:spPr>
+          <a:xfrm>
+            <a:off x="4663440" y="3566160"/>
             <a:ext cx="1280160" cy="502920"/>
           </a:xfrm>
           <a:prstGeom prst="rect">
@@ -10587,7 +11084,7 @@
                 <a:ea typeface="Consolas" pitchFamily="34" charset="-122"/>
                 <a:cs typeface="Consolas" pitchFamily="34" charset="-120"/>
               </a:rPr>
-              <a:t>0.064</a:t>
+              <a:t>0.077</a:t>
             </a:r>
             <a:endParaRPr lang="en-US" sz="1300" dirty="0"/>
           </a:p>
@@ -10595,13 +11092,13 @@
       </p:sp>
       <p:sp>
         <p:nvSpPr>
-          <p:cNvPr id="38" name="Shape 36"/>
-          <p:cNvSpPr/>
-          <p:nvPr/>
-        </p:nvSpPr>
-        <p:spPr>
-          <a:xfrm>
-            <a:off x="5943600" y="2560320"/>
+          <p:cNvPr id="52" name="Shape 50"/>
+          <p:cNvSpPr/>
+          <p:nvPr/>
+        </p:nvSpPr>
+        <p:spPr>
+          <a:xfrm>
+            <a:off x="5943600" y="3566160"/>
             <a:ext cx="1280160" cy="502920"/>
           </a:xfrm>
           <a:prstGeom prst="rect">
@@ -10627,13 +11124,13 @@
       </p:sp>
       <p:sp>
         <p:nvSpPr>
-          <p:cNvPr id="39" name="Text 37"/>
-          <p:cNvSpPr/>
-          <p:nvPr/>
-        </p:nvSpPr>
-        <p:spPr>
-          <a:xfrm>
-            <a:off x="5943600" y="2560320"/>
+          <p:cNvPr id="53" name="Text 51"/>
+          <p:cNvSpPr/>
+          <p:nvPr/>
+        </p:nvSpPr>
+        <p:spPr>
+          <a:xfrm>
+            <a:off x="5943600" y="3566160"/>
             <a:ext cx="1280160" cy="502920"/>
           </a:xfrm>
           <a:prstGeom prst="rect">
@@ -10658,7 +11155,7 @@
                 <a:ea typeface="Consolas" pitchFamily="34" charset="-122"/>
                 <a:cs typeface="Consolas" pitchFamily="34" charset="-120"/>
               </a:rPr>
-              <a:t>0.520</a:t>
+              <a:t>0.591</a:t>
             </a:r>
             <a:endParaRPr lang="en-US" sz="1300" dirty="0"/>
           </a:p>
@@ -10666,13 +11163,13 @@
       </p:sp>
       <p:sp>
         <p:nvSpPr>
-          <p:cNvPr id="40" name="Shape 38"/>
-          <p:cNvSpPr/>
-          <p:nvPr/>
-        </p:nvSpPr>
-        <p:spPr>
-          <a:xfrm>
-            <a:off x="7223760" y="2560320"/>
+          <p:cNvPr id="54" name="Shape 52"/>
+          <p:cNvSpPr/>
+          <p:nvPr/>
+        </p:nvSpPr>
+        <p:spPr>
+          <a:xfrm>
+            <a:off x="7223760" y="3566160"/>
             <a:ext cx="1280160" cy="502920"/>
           </a:xfrm>
           <a:prstGeom prst="rect">
@@ -10698,13 +11195,13 @@
       </p:sp>
       <p:sp>
         <p:nvSpPr>
-          <p:cNvPr id="41" name="Text 39"/>
-          <p:cNvSpPr/>
-          <p:nvPr/>
-        </p:nvSpPr>
-        <p:spPr>
-          <a:xfrm>
-            <a:off x="7223760" y="2560320"/>
+          <p:cNvPr id="55" name="Text 53"/>
+          <p:cNvSpPr/>
+          <p:nvPr/>
+        </p:nvSpPr>
+        <p:spPr>
+          <a:xfrm>
+            <a:off x="7223760" y="3566160"/>
             <a:ext cx="1280160" cy="502920"/>
           </a:xfrm>
           <a:prstGeom prst="rect">
@@ -10729,7 +11226,7 @@
                 <a:ea typeface="Consolas" pitchFamily="34" charset="-122"/>
                 <a:cs typeface="Consolas" pitchFamily="34" charset="-120"/>
               </a:rPr>
-              <a:t>0.369</a:t>
+              <a:t>0.432</a:t>
             </a:r>
             <a:endParaRPr lang="en-US" sz="1300" dirty="0"/>
           </a:p>
@@ -10737,13 +11234,13 @@
       </p:sp>
       <p:sp>
         <p:nvSpPr>
-          <p:cNvPr id="42" name="Shape 40"/>
-          <p:cNvSpPr/>
-          <p:nvPr/>
-        </p:nvSpPr>
-        <p:spPr>
-          <a:xfrm>
-            <a:off x="8503920" y="2560320"/>
+          <p:cNvPr id="56" name="Shape 54"/>
+          <p:cNvSpPr/>
+          <p:nvPr/>
+        </p:nvSpPr>
+        <p:spPr>
+          <a:xfrm>
+            <a:off x="8503920" y="3566160"/>
             <a:ext cx="1280160" cy="502920"/>
           </a:xfrm>
           <a:prstGeom prst="rect">
@@ -10769,13 +11266,13 @@
       </p:sp>
       <p:sp>
         <p:nvSpPr>
-          <p:cNvPr id="43" name="Text 41"/>
-          <p:cNvSpPr/>
-          <p:nvPr/>
-        </p:nvSpPr>
-        <p:spPr>
-          <a:xfrm>
-            <a:off x="8503920" y="2560320"/>
+          <p:cNvPr id="57" name="Text 55"/>
+          <p:cNvSpPr/>
+          <p:nvPr/>
+        </p:nvSpPr>
+        <p:spPr>
+          <a:xfrm>
+            <a:off x="8503920" y="3566160"/>
             <a:ext cx="1280160" cy="502920"/>
           </a:xfrm>
           <a:prstGeom prst="rect">
@@ -10800,7 +11297,7 @@
                 <a:ea typeface="Consolas" pitchFamily="34" charset="-122"/>
                 <a:cs typeface="Consolas" pitchFamily="34" charset="-120"/>
               </a:rPr>
-              <a:t>0.480</a:t>
+              <a:t>0.547</a:t>
             </a:r>
             <a:endParaRPr lang="en-US" sz="1300" dirty="0"/>
           </a:p>
@@ -10808,13 +11305,13 @@
       </p:sp>
       <p:sp>
         <p:nvSpPr>
-          <p:cNvPr id="44" name="Shape 42"/>
-          <p:cNvSpPr/>
-          <p:nvPr/>
-        </p:nvSpPr>
-        <p:spPr>
-          <a:xfrm>
-            <a:off x="9784080" y="2560320"/>
+          <p:cNvPr id="58" name="Shape 56"/>
+          <p:cNvSpPr/>
+          <p:nvPr/>
+        </p:nvSpPr>
+        <p:spPr>
+          <a:xfrm>
+            <a:off x="9784080" y="3566160"/>
             <a:ext cx="1371600" cy="502920"/>
           </a:xfrm>
           <a:prstGeom prst="rect">
@@ -10840,13 +11337,13 @@
       </p:sp>
       <p:sp>
         <p:nvSpPr>
-          <p:cNvPr id="45" name="Text 43"/>
-          <p:cNvSpPr/>
-          <p:nvPr/>
-        </p:nvSpPr>
-        <p:spPr>
-          <a:xfrm>
-            <a:off x="9784080" y="2560320"/>
+          <p:cNvPr id="59" name="Text 57"/>
+          <p:cNvSpPr/>
+          <p:nvPr/>
+        </p:nvSpPr>
+        <p:spPr>
+          <a:xfrm>
+            <a:off x="9784080" y="3566160"/>
             <a:ext cx="1371600" cy="502920"/>
           </a:xfrm>
           <a:prstGeom prst="rect">
@@ -10871,7 +11368,7 @@
                 <a:ea typeface="Consolas" pitchFamily="34" charset="-122"/>
                 <a:cs typeface="Consolas" pitchFamily="34" charset="-120"/>
               </a:rPr>
-              <a:t>0.824</a:t>
+              <a:t>0.865</a:t>
             </a:r>
             <a:endParaRPr lang="en-US" sz="1300" dirty="0"/>
           </a:p>
@@ -10879,511 +11376,14 @@
       </p:sp>
       <p:sp>
         <p:nvSpPr>
-          <p:cNvPr id="46" name="Shape 44"/>
-          <p:cNvSpPr/>
-          <p:nvPr/>
-        </p:nvSpPr>
-        <p:spPr>
-          <a:xfrm>
-            <a:off x="457200" y="3063240"/>
-            <a:ext cx="2926080" cy="502920"/>
-          </a:xfrm>
-          <a:prstGeom prst="rect">
-            <a:avLst/>
-          </a:prstGeom>
-          <a:solidFill>
-            <a:srgbClr val="FFFFFF"/>
-          </a:solidFill>
-          <a:ln w="6350">
-            <a:solidFill>
-              <a:srgbClr val="D0D5DD"/>
-            </a:solidFill>
-            <a:prstDash val="solid"/>
-          </a:ln>
-        </p:spPr>
-        <p:txBody>
-          <a:bodyPr/>
-          <a:lstStyle/>
-          <a:p>
-            <a:endParaRPr lang="en-US"/>
-          </a:p>
-        </p:txBody>
-      </p:sp>
-      <p:sp>
-        <p:nvSpPr>
-          <p:cNvPr id="47" name="Text 45"/>
-          <p:cNvSpPr/>
-          <p:nvPr/>
-        </p:nvSpPr>
-        <p:spPr>
-          <a:xfrm>
-            <a:off x="457200" y="3063240"/>
-            <a:ext cx="2926080" cy="502920"/>
-          </a:xfrm>
-          <a:prstGeom prst="rect">
-            <a:avLst/>
-          </a:prstGeom>
-          <a:noFill/>
-          <a:ln/>
-        </p:spPr>
-        <p:txBody>
-          <a:bodyPr wrap="square" lIns="0" tIns="0" rIns="0" bIns="0" rtlCol="0" anchor="ctr"/>
-          <a:lstStyle/>
-          <a:p>
-            <a:pPr marL="0" indent="0" algn="ctr">
-              <a:buNone/>
-            </a:pPr>
-            <a:r>
-              <a:rPr lang="en-US" sz="1300" b="1" dirty="0">
-                <a:solidFill>
-                  <a:srgbClr val="1A1F2E"/>
-                </a:solidFill>
-                <a:latin typeface="Calibri" pitchFamily="34" charset="0"/>
-                <a:ea typeface="Calibri" pitchFamily="34" charset="-122"/>
-                <a:cs typeface="Calibri" pitchFamily="34" charset="-120"/>
-              </a:rPr>
-              <a:t>Categorical only</a:t>
-            </a:r>
-            <a:endParaRPr lang="en-US" sz="1300" dirty="0"/>
-          </a:p>
-        </p:txBody>
-      </p:sp>
-      <p:sp>
-        <p:nvSpPr>
-          <p:cNvPr id="48" name="Shape 46"/>
-          <p:cNvSpPr/>
-          <p:nvPr/>
-        </p:nvSpPr>
-        <p:spPr>
-          <a:xfrm>
-            <a:off x="3383280" y="3063240"/>
-            <a:ext cx="1280160" cy="502920"/>
-          </a:xfrm>
-          <a:prstGeom prst="rect">
-            <a:avLst/>
-          </a:prstGeom>
-          <a:solidFill>
-            <a:srgbClr val="FFFFFF"/>
-          </a:solidFill>
-          <a:ln w="6350">
-            <a:solidFill>
-              <a:srgbClr val="D0D5DD"/>
-            </a:solidFill>
-            <a:prstDash val="solid"/>
-          </a:ln>
-        </p:spPr>
-        <p:txBody>
-          <a:bodyPr/>
-          <a:lstStyle/>
-          <a:p>
-            <a:endParaRPr lang="en-US"/>
-          </a:p>
-        </p:txBody>
-      </p:sp>
-      <p:sp>
-        <p:nvSpPr>
-          <p:cNvPr id="49" name="Text 47"/>
-          <p:cNvSpPr/>
-          <p:nvPr/>
-        </p:nvSpPr>
-        <p:spPr>
-          <a:xfrm>
-            <a:off x="3383280" y="3063240"/>
-            <a:ext cx="1280160" cy="502920"/>
-          </a:xfrm>
-          <a:prstGeom prst="rect">
-            <a:avLst/>
-          </a:prstGeom>
-          <a:noFill/>
-          <a:ln/>
-        </p:spPr>
-        <p:txBody>
-          <a:bodyPr wrap="square" lIns="0" tIns="0" rIns="0" bIns="0" rtlCol="0" anchor="ctr"/>
-          <a:lstStyle/>
-          <a:p>
-            <a:pPr marL="0" indent="0" algn="ctr">
-              <a:buNone/>
-            </a:pPr>
-            <a:r>
-              <a:rPr lang="en-US" sz="1300" dirty="0">
-                <a:solidFill>
-                  <a:srgbClr val="1A1F2E"/>
-                </a:solidFill>
-                <a:latin typeface="Consolas" pitchFamily="34" charset="0"/>
-                <a:ea typeface="Consolas" pitchFamily="34" charset="-122"/>
-                <a:cs typeface="Consolas" pitchFamily="34" charset="-120"/>
-              </a:rPr>
-              <a:t>0.481</a:t>
-            </a:r>
-            <a:endParaRPr lang="en-US" sz="1300" dirty="0"/>
-          </a:p>
-        </p:txBody>
-      </p:sp>
-      <p:sp>
-        <p:nvSpPr>
-          <p:cNvPr id="50" name="Shape 48"/>
-          <p:cNvSpPr/>
-          <p:nvPr/>
-        </p:nvSpPr>
-        <p:spPr>
-          <a:xfrm>
-            <a:off x="4663440" y="3063240"/>
-            <a:ext cx="1280160" cy="502920"/>
-          </a:xfrm>
-          <a:prstGeom prst="rect">
-            <a:avLst/>
-          </a:prstGeom>
-          <a:solidFill>
-            <a:srgbClr val="FFFFFF"/>
-          </a:solidFill>
-          <a:ln w="6350">
-            <a:solidFill>
-              <a:srgbClr val="D0D5DD"/>
-            </a:solidFill>
-            <a:prstDash val="solid"/>
-          </a:ln>
-        </p:spPr>
-        <p:txBody>
-          <a:bodyPr/>
-          <a:lstStyle/>
-          <a:p>
-            <a:endParaRPr lang="en-US"/>
-          </a:p>
-        </p:txBody>
-      </p:sp>
-      <p:sp>
-        <p:nvSpPr>
-          <p:cNvPr id="51" name="Text 49"/>
-          <p:cNvSpPr/>
-          <p:nvPr/>
-        </p:nvSpPr>
-        <p:spPr>
-          <a:xfrm>
-            <a:off x="4663440" y="3063240"/>
-            <a:ext cx="1280160" cy="502920"/>
-          </a:xfrm>
-          <a:prstGeom prst="rect">
-            <a:avLst/>
-          </a:prstGeom>
-          <a:noFill/>
-          <a:ln/>
-        </p:spPr>
-        <p:txBody>
-          <a:bodyPr wrap="square" lIns="0" tIns="0" rIns="0" bIns="0" rtlCol="0" anchor="ctr"/>
-          <a:lstStyle/>
-          <a:p>
-            <a:pPr marL="0" indent="0" algn="ctr">
-              <a:buNone/>
-            </a:pPr>
-            <a:r>
-              <a:rPr lang="en-US" sz="1300" dirty="0">
-                <a:solidFill>
-                  <a:srgbClr val="1A1F2E"/>
-                </a:solidFill>
-                <a:latin typeface="Consolas" pitchFamily="34" charset="0"/>
-                <a:ea typeface="Consolas" pitchFamily="34" charset="-122"/>
-                <a:cs typeface="Consolas" pitchFamily="34" charset="-120"/>
-              </a:rPr>
-              <a:t>0.077</a:t>
-            </a:r>
-            <a:endParaRPr lang="en-US" sz="1300" dirty="0"/>
-          </a:p>
-        </p:txBody>
-      </p:sp>
-      <p:sp>
-        <p:nvSpPr>
-          <p:cNvPr id="52" name="Shape 50"/>
-          <p:cNvSpPr/>
-          <p:nvPr/>
-        </p:nvSpPr>
-        <p:spPr>
-          <a:xfrm>
-            <a:off x="5943600" y="3063240"/>
-            <a:ext cx="1280160" cy="502920"/>
-          </a:xfrm>
-          <a:prstGeom prst="rect">
-            <a:avLst/>
-          </a:prstGeom>
-          <a:solidFill>
-            <a:srgbClr val="FFFFFF"/>
-          </a:solidFill>
-          <a:ln w="6350">
-            <a:solidFill>
-              <a:srgbClr val="D0D5DD"/>
-            </a:solidFill>
-            <a:prstDash val="solid"/>
-          </a:ln>
-        </p:spPr>
-        <p:txBody>
-          <a:bodyPr/>
-          <a:lstStyle/>
-          <a:p>
-            <a:endParaRPr lang="en-US"/>
-          </a:p>
-        </p:txBody>
-      </p:sp>
-      <p:sp>
-        <p:nvSpPr>
-          <p:cNvPr id="53" name="Text 51"/>
-          <p:cNvSpPr/>
-          <p:nvPr/>
-        </p:nvSpPr>
-        <p:spPr>
-          <a:xfrm>
-            <a:off x="5943600" y="3063240"/>
-            <a:ext cx="1280160" cy="502920"/>
-          </a:xfrm>
-          <a:prstGeom prst="rect">
-            <a:avLst/>
-          </a:prstGeom>
-          <a:noFill/>
-          <a:ln/>
-        </p:spPr>
-        <p:txBody>
-          <a:bodyPr wrap="square" lIns="0" tIns="0" rIns="0" bIns="0" rtlCol="0" anchor="ctr"/>
-          <a:lstStyle/>
-          <a:p>
-            <a:pPr marL="0" indent="0" algn="ctr">
-              <a:buNone/>
-            </a:pPr>
-            <a:r>
-              <a:rPr lang="en-US" sz="1300" dirty="0">
-                <a:solidFill>
-                  <a:srgbClr val="1A1F2E"/>
-                </a:solidFill>
-                <a:latin typeface="Consolas" pitchFamily="34" charset="0"/>
-                <a:ea typeface="Consolas" pitchFamily="34" charset="-122"/>
-                <a:cs typeface="Consolas" pitchFamily="34" charset="-120"/>
-              </a:rPr>
-              <a:t>0.591</a:t>
-            </a:r>
-            <a:endParaRPr lang="en-US" sz="1300" dirty="0"/>
-          </a:p>
-        </p:txBody>
-      </p:sp>
-      <p:sp>
-        <p:nvSpPr>
-          <p:cNvPr id="54" name="Shape 52"/>
-          <p:cNvSpPr/>
-          <p:nvPr/>
-        </p:nvSpPr>
-        <p:spPr>
-          <a:xfrm>
-            <a:off x="7223760" y="3063240"/>
-            <a:ext cx="1280160" cy="502920"/>
-          </a:xfrm>
-          <a:prstGeom prst="rect">
-            <a:avLst/>
-          </a:prstGeom>
-          <a:solidFill>
-            <a:srgbClr val="FFFFFF"/>
-          </a:solidFill>
-          <a:ln w="6350">
-            <a:solidFill>
-              <a:srgbClr val="D0D5DD"/>
-            </a:solidFill>
-            <a:prstDash val="solid"/>
-          </a:ln>
-        </p:spPr>
-        <p:txBody>
-          <a:bodyPr/>
-          <a:lstStyle/>
-          <a:p>
-            <a:endParaRPr lang="en-US"/>
-          </a:p>
-        </p:txBody>
-      </p:sp>
-      <p:sp>
-        <p:nvSpPr>
-          <p:cNvPr id="55" name="Text 53"/>
-          <p:cNvSpPr/>
-          <p:nvPr/>
-        </p:nvSpPr>
-        <p:spPr>
-          <a:xfrm>
-            <a:off x="7223760" y="3063240"/>
-            <a:ext cx="1280160" cy="502920"/>
-          </a:xfrm>
-          <a:prstGeom prst="rect">
-            <a:avLst/>
-          </a:prstGeom>
-          <a:noFill/>
-          <a:ln/>
-        </p:spPr>
-        <p:txBody>
-          <a:bodyPr wrap="square" lIns="0" tIns="0" rIns="0" bIns="0" rtlCol="0" anchor="ctr"/>
-          <a:lstStyle/>
-          <a:p>
-            <a:pPr marL="0" indent="0" algn="ctr">
-              <a:buNone/>
-            </a:pPr>
-            <a:r>
-              <a:rPr lang="en-US" sz="1300" dirty="0">
-                <a:solidFill>
-                  <a:srgbClr val="1A1F2E"/>
-                </a:solidFill>
-                <a:latin typeface="Consolas" pitchFamily="34" charset="0"/>
-                <a:ea typeface="Consolas" pitchFamily="34" charset="-122"/>
-                <a:cs typeface="Consolas" pitchFamily="34" charset="-120"/>
-              </a:rPr>
-              <a:t>0.432</a:t>
-            </a:r>
-            <a:endParaRPr lang="en-US" sz="1300" dirty="0"/>
-          </a:p>
-        </p:txBody>
-      </p:sp>
-      <p:sp>
-        <p:nvSpPr>
-          <p:cNvPr id="56" name="Shape 54"/>
-          <p:cNvSpPr/>
-          <p:nvPr/>
-        </p:nvSpPr>
-        <p:spPr>
-          <a:xfrm>
-            <a:off x="8503920" y="3063240"/>
-            <a:ext cx="1280160" cy="502920"/>
-          </a:xfrm>
-          <a:prstGeom prst="rect">
-            <a:avLst/>
-          </a:prstGeom>
-          <a:solidFill>
-            <a:srgbClr val="FFFFFF"/>
-          </a:solidFill>
-          <a:ln w="6350">
-            <a:solidFill>
-              <a:srgbClr val="D0D5DD"/>
-            </a:solidFill>
-            <a:prstDash val="solid"/>
-          </a:ln>
-        </p:spPr>
-        <p:txBody>
-          <a:bodyPr/>
-          <a:lstStyle/>
-          <a:p>
-            <a:endParaRPr lang="en-US"/>
-          </a:p>
-        </p:txBody>
-      </p:sp>
-      <p:sp>
-        <p:nvSpPr>
-          <p:cNvPr id="57" name="Text 55"/>
-          <p:cNvSpPr/>
-          <p:nvPr/>
-        </p:nvSpPr>
-        <p:spPr>
-          <a:xfrm>
-            <a:off x="8503920" y="3063240"/>
-            <a:ext cx="1280160" cy="502920"/>
-          </a:xfrm>
-          <a:prstGeom prst="rect">
-            <a:avLst/>
-          </a:prstGeom>
-          <a:noFill/>
-          <a:ln/>
-        </p:spPr>
-        <p:txBody>
-          <a:bodyPr wrap="square" lIns="0" tIns="0" rIns="0" bIns="0" rtlCol="0" anchor="ctr"/>
-          <a:lstStyle/>
-          <a:p>
-            <a:pPr marL="0" indent="0" algn="ctr">
-              <a:buNone/>
-            </a:pPr>
-            <a:r>
-              <a:rPr lang="en-US" sz="1300" dirty="0">
-                <a:solidFill>
-                  <a:srgbClr val="1A1F2E"/>
-                </a:solidFill>
-                <a:latin typeface="Consolas" pitchFamily="34" charset="0"/>
-                <a:ea typeface="Consolas" pitchFamily="34" charset="-122"/>
-                <a:cs typeface="Consolas" pitchFamily="34" charset="-120"/>
-              </a:rPr>
-              <a:t>0.547</a:t>
-            </a:r>
-            <a:endParaRPr lang="en-US" sz="1300" dirty="0"/>
-          </a:p>
-        </p:txBody>
-      </p:sp>
-      <p:sp>
-        <p:nvSpPr>
-          <p:cNvPr id="58" name="Shape 56"/>
-          <p:cNvSpPr/>
-          <p:nvPr/>
-        </p:nvSpPr>
-        <p:spPr>
-          <a:xfrm>
-            <a:off x="9784080" y="3063240"/>
-            <a:ext cx="1371600" cy="502920"/>
-          </a:xfrm>
-          <a:prstGeom prst="rect">
-            <a:avLst/>
-          </a:prstGeom>
-          <a:solidFill>
-            <a:srgbClr val="FFFFFF"/>
-          </a:solidFill>
-          <a:ln w="6350">
-            <a:solidFill>
-              <a:srgbClr val="D0D5DD"/>
-            </a:solidFill>
-            <a:prstDash val="solid"/>
-          </a:ln>
-        </p:spPr>
-        <p:txBody>
-          <a:bodyPr/>
-          <a:lstStyle/>
-          <a:p>
-            <a:endParaRPr lang="en-US"/>
-          </a:p>
-        </p:txBody>
-      </p:sp>
-      <p:sp>
-        <p:nvSpPr>
-          <p:cNvPr id="59" name="Text 57"/>
-          <p:cNvSpPr/>
-          <p:nvPr/>
-        </p:nvSpPr>
-        <p:spPr>
-          <a:xfrm>
-            <a:off x="9784080" y="3063240"/>
-            <a:ext cx="1371600" cy="502920"/>
-          </a:xfrm>
-          <a:prstGeom prst="rect">
-            <a:avLst/>
-          </a:prstGeom>
-          <a:noFill/>
-          <a:ln/>
-        </p:spPr>
-        <p:txBody>
-          <a:bodyPr wrap="square" lIns="0" tIns="0" rIns="0" bIns="0" rtlCol="0" anchor="ctr"/>
-          <a:lstStyle/>
-          <a:p>
-            <a:pPr marL="0" indent="0" algn="ctr">
-              <a:buNone/>
-            </a:pPr>
-            <a:r>
-              <a:rPr lang="en-US" sz="1300" dirty="0">
-                <a:solidFill>
-                  <a:srgbClr val="1A1F2E"/>
-                </a:solidFill>
-                <a:latin typeface="Consolas" pitchFamily="34" charset="0"/>
-                <a:ea typeface="Consolas" pitchFamily="34" charset="-122"/>
-                <a:cs typeface="Consolas" pitchFamily="34" charset="-120"/>
-              </a:rPr>
-              <a:t>0.865</a:t>
-            </a:r>
-            <a:endParaRPr lang="en-US" sz="1300" dirty="0"/>
-          </a:p>
-        </p:txBody>
-      </p:sp>
-      <p:sp>
-        <p:nvSpPr>
           <p:cNvPr id="60" name="Shape 58"/>
           <p:cNvSpPr/>
           <p:nvPr/>
         </p:nvSpPr>
         <p:spPr>
           <a:xfrm>
-            <a:off x="457200" y="4114800"/>
-            <a:ext cx="11247120" cy="2286000"/>
+            <a:off x="457200" y="4224528"/>
+            <a:ext cx="11247120" cy="2176272"/>
           </a:xfrm>
           <a:prstGeom prst="rect">
             <a:avLst/>
@@ -11414,7 +11414,7 @@
         </p:nvSpPr>
         <p:spPr>
           <a:xfrm>
-            <a:off x="640080" y="4251960"/>
+            <a:off x="640080" y="4361688"/>
             <a:ext cx="10972800" cy="411480"/>
           </a:xfrm>
           <a:prstGeom prst="rect">
@@ -11453,8 +11453,8 @@
         </p:nvSpPr>
         <p:spPr>
           <a:xfrm>
-            <a:off x="640080" y="4709160"/>
-            <a:ext cx="10972800" cy="1645920"/>
+            <a:off x="640080" y="4818888"/>
+            <a:ext cx="10972800" cy="1536192"/>
           </a:xfrm>
           <a:prstGeom prst="rect">
             <a:avLst/>
@@ -11638,6 +11638,503 @@
               <a:t>16 / 29</a:t>
             </a:r>
             <a:endParaRPr lang="en-US" sz="1000" dirty="0"/>
+          </a:p>
+        </p:txBody>
+      </p:sp>
+      <p:sp>
+        <p:nvSpPr>
+          <p:cNvPr id="18" name="Shape 16"/>
+          <p:cNvSpPr/>
+          <p:nvPr/>
+        </p:nvSpPr>
+        <p:spPr>
+          <a:xfrm>
+            <a:off x="457200" y="2560320"/>
+            <a:ext cx="2926080" cy="502920"/>
+          </a:xfrm>
+          <a:prstGeom prst="rect">
+            <a:avLst/>
+          </a:prstGeom>
+          <a:solidFill>
+            <a:srgbClr val="F7F9FB"/>
+          </a:solidFill>
+          <a:ln w="6350">
+            <a:solidFill>
+              <a:srgbClr val="D0D5DD"/>
+            </a:solidFill>
+            <a:prstDash val="solid"/>
+          </a:ln>
+        </p:spPr>
+        <p:txBody>
+          <a:bodyPr/>
+          <a:lstStyle/>
+          <a:p>
+            <a:endParaRPr lang="en-US"/>
+          </a:p>
+        </p:txBody>
+      </p:sp>
+      <p:sp>
+        <p:nvSpPr>
+          <p:cNvPr id="19" name="Text 17"/>
+          <p:cNvSpPr/>
+          <p:nvPr/>
+        </p:nvSpPr>
+        <p:spPr>
+          <a:xfrm>
+            <a:off x="457200" y="2560320"/>
+            <a:ext cx="2926080" cy="502920"/>
+          </a:xfrm>
+          <a:prstGeom prst="rect">
+            <a:avLst/>
+          </a:prstGeom>
+          <a:noFill/>
+          <a:ln/>
+        </p:spPr>
+        <p:txBody>
+          <a:bodyPr wrap="square" lIns="0" tIns="0" rIns="0" bIns="0" rtlCol="0" anchor="ctr"/>
+          <a:lstStyle/>
+          <a:p>
+            <a:pPr marL="0" indent="0" algn="ctr">
+              <a:buNone/>
+            </a:pPr>
+            <a:r>
+              <a:rPr lang="en-US" sz="1300" b="1" dirty="0">
+                <a:solidFill>
+                  <a:srgbClr val="1A1F2E"/>
+                </a:solidFill>
+                <a:latin typeface="Calibri" pitchFamily="34" charset="0"/>
+                <a:ea typeface="Calibri" pitchFamily="34" charset="-122"/>
+                <a:cs typeface="Calibri" pitchFamily="34" charset="-120"/>
+              </a:rPr>
+              <a:t>Structured only</a:t>
+            </a:r>
+            <a:endParaRPr lang="en-US" sz="1300" dirty="0"/>
+          </a:p>
+        </p:txBody>
+      </p:sp>
+      <p:sp>
+        <p:nvSpPr>
+          <p:cNvPr id="20" name="Shape 18"/>
+          <p:cNvSpPr/>
+          <p:nvPr/>
+        </p:nvSpPr>
+        <p:spPr>
+          <a:xfrm>
+            <a:off x="3383280" y="2560320"/>
+            <a:ext cx="1280160" cy="502920"/>
+          </a:xfrm>
+          <a:prstGeom prst="rect">
+            <a:avLst/>
+          </a:prstGeom>
+          <a:solidFill>
+            <a:srgbClr val="F7F9FB"/>
+          </a:solidFill>
+          <a:ln w="6350">
+            <a:solidFill>
+              <a:srgbClr val="D0D5DD"/>
+            </a:solidFill>
+            <a:prstDash val="solid"/>
+          </a:ln>
+        </p:spPr>
+        <p:txBody>
+          <a:bodyPr/>
+          <a:lstStyle/>
+          <a:p>
+            <a:endParaRPr lang="en-US"/>
+          </a:p>
+        </p:txBody>
+      </p:sp>
+      <p:sp>
+        <p:nvSpPr>
+          <p:cNvPr id="21" name="Text 19"/>
+          <p:cNvSpPr/>
+          <p:nvPr/>
+        </p:nvSpPr>
+        <p:spPr>
+          <a:xfrm>
+            <a:off x="3383280" y="2560320"/>
+            <a:ext cx="1280160" cy="502920"/>
+          </a:xfrm>
+          <a:prstGeom prst="rect">
+            <a:avLst/>
+          </a:prstGeom>
+          <a:noFill/>
+          <a:ln/>
+        </p:spPr>
+        <p:txBody>
+          <a:bodyPr wrap="square" lIns="0" tIns="0" rIns="0" bIns="0" rtlCol="0" anchor="ctr"/>
+          <a:lstStyle/>
+          <a:p>
+            <a:pPr marL="0" indent="0" algn="ctr">
+              <a:buNone/>
+            </a:pPr>
+            <a:r>
+              <a:rPr lang="en-US" sz="1300" dirty="0">
+                <a:solidFill>
+                  <a:srgbClr val="1A1F2E"/>
+                </a:solidFill>
+                <a:latin typeface="Consolas" pitchFamily="34" charset="0"/>
+                <a:ea typeface="Consolas" pitchFamily="34" charset="-122"/>
+                <a:cs typeface="Consolas" pitchFamily="34" charset="-120"/>
+              </a:rPr>
+              <a:t>0.423</a:t>
+            </a:r>
+            <a:endParaRPr lang="en-US" sz="1300" dirty="0"/>
+          </a:p>
+        </p:txBody>
+      </p:sp>
+      <p:sp>
+        <p:nvSpPr>
+          <p:cNvPr id="22" name="Shape 20"/>
+          <p:cNvSpPr/>
+          <p:nvPr/>
+        </p:nvSpPr>
+        <p:spPr>
+          <a:xfrm>
+            <a:off x="4663440" y="2560320"/>
+            <a:ext cx="1280160" cy="502920"/>
+          </a:xfrm>
+          <a:prstGeom prst="rect">
+            <a:avLst/>
+          </a:prstGeom>
+          <a:solidFill>
+            <a:srgbClr val="F7F9FB"/>
+          </a:solidFill>
+          <a:ln w="6350">
+            <a:solidFill>
+              <a:srgbClr val="D0D5DD"/>
+            </a:solidFill>
+            <a:prstDash val="solid"/>
+          </a:ln>
+        </p:spPr>
+        <p:txBody>
+          <a:bodyPr/>
+          <a:lstStyle/>
+          <a:p>
+            <a:endParaRPr lang="en-US"/>
+          </a:p>
+        </p:txBody>
+      </p:sp>
+      <p:sp>
+        <p:nvSpPr>
+          <p:cNvPr id="23" name="Text 21"/>
+          <p:cNvSpPr/>
+          <p:nvPr/>
+        </p:nvSpPr>
+        <p:spPr>
+          <a:xfrm>
+            <a:off x="4663440" y="2560320"/>
+            <a:ext cx="1280160" cy="502920"/>
+          </a:xfrm>
+          <a:prstGeom prst="rect">
+            <a:avLst/>
+          </a:prstGeom>
+          <a:noFill/>
+          <a:ln/>
+        </p:spPr>
+        <p:txBody>
+          <a:bodyPr wrap="square" lIns="0" tIns="0" rIns="0" bIns="0" rtlCol="0" anchor="ctr"/>
+          <a:lstStyle/>
+          <a:p>
+            <a:pPr marL="0" indent="0" algn="ctr">
+              <a:buNone/>
+            </a:pPr>
+            <a:r>
+              <a:rPr lang="en-US" sz="1300" dirty="0">
+                <a:solidFill>
+                  <a:srgbClr val="1A1F2E"/>
+                </a:solidFill>
+                <a:latin typeface="Consolas" pitchFamily="34" charset="0"/>
+                <a:ea typeface="Consolas" pitchFamily="34" charset="-122"/>
+                <a:cs typeface="Consolas" pitchFamily="34" charset="-120"/>
+              </a:rPr>
+              <a:t>0.066</a:t>
+            </a:r>
+            <a:endParaRPr lang="en-US" sz="1300" dirty="0"/>
+          </a:p>
+        </p:txBody>
+      </p:sp>
+      <p:sp>
+        <p:nvSpPr>
+          <p:cNvPr id="24" name="Shape 22"/>
+          <p:cNvSpPr/>
+          <p:nvPr/>
+        </p:nvSpPr>
+        <p:spPr>
+          <a:xfrm>
+            <a:off x="5943600" y="2560320"/>
+            <a:ext cx="1280160" cy="502920"/>
+          </a:xfrm>
+          <a:prstGeom prst="rect">
+            <a:avLst/>
+          </a:prstGeom>
+          <a:solidFill>
+            <a:srgbClr val="F7F9FB"/>
+          </a:solidFill>
+          <a:ln w="6350">
+            <a:solidFill>
+              <a:srgbClr val="D0D5DD"/>
+            </a:solidFill>
+            <a:prstDash val="solid"/>
+          </a:ln>
+        </p:spPr>
+        <p:txBody>
+          <a:bodyPr/>
+          <a:lstStyle/>
+          <a:p>
+            <a:endParaRPr lang="en-US"/>
+          </a:p>
+        </p:txBody>
+      </p:sp>
+      <p:sp>
+        <p:nvSpPr>
+          <p:cNvPr id="25" name="Text 23"/>
+          <p:cNvSpPr/>
+          <p:nvPr/>
+        </p:nvSpPr>
+        <p:spPr>
+          <a:xfrm>
+            <a:off x="5943600" y="2560320"/>
+            <a:ext cx="1280160" cy="502920"/>
+          </a:xfrm>
+          <a:prstGeom prst="rect">
+            <a:avLst/>
+          </a:prstGeom>
+          <a:noFill/>
+          <a:ln/>
+        </p:spPr>
+        <p:txBody>
+          <a:bodyPr wrap="square" lIns="0" tIns="0" rIns="0" bIns="0" rtlCol="0" anchor="ctr"/>
+          <a:lstStyle/>
+          <a:p>
+            <a:pPr marL="0" indent="0" algn="ctr">
+              <a:buNone/>
+            </a:pPr>
+            <a:r>
+              <a:rPr lang="en-US" sz="1300" dirty="0">
+                <a:solidFill>
+                  <a:srgbClr val="1A1F2E"/>
+                </a:solidFill>
+                <a:latin typeface="Consolas" pitchFamily="34" charset="0"/>
+                <a:ea typeface="Consolas" pitchFamily="34" charset="-122"/>
+                <a:cs typeface="Consolas" pitchFamily="34" charset="-120"/>
+              </a:rPr>
+              <a:t>0.538</a:t>
+            </a:r>
+            <a:endParaRPr lang="en-US" sz="1300" dirty="0"/>
+          </a:p>
+        </p:txBody>
+      </p:sp>
+      <p:sp>
+        <p:nvSpPr>
+          <p:cNvPr id="26" name="Shape 24"/>
+          <p:cNvSpPr/>
+          <p:nvPr/>
+        </p:nvSpPr>
+        <p:spPr>
+          <a:xfrm>
+            <a:off x="7223760" y="2560320"/>
+            <a:ext cx="1280160" cy="502920"/>
+          </a:xfrm>
+          <a:prstGeom prst="rect">
+            <a:avLst/>
+          </a:prstGeom>
+          <a:solidFill>
+            <a:srgbClr val="F7F9FB"/>
+          </a:solidFill>
+          <a:ln w="6350">
+            <a:solidFill>
+              <a:srgbClr val="D0D5DD"/>
+            </a:solidFill>
+            <a:prstDash val="solid"/>
+          </a:ln>
+        </p:spPr>
+        <p:txBody>
+          <a:bodyPr/>
+          <a:lstStyle/>
+          <a:p>
+            <a:endParaRPr lang="en-US"/>
+          </a:p>
+        </p:txBody>
+      </p:sp>
+      <p:sp>
+        <p:nvSpPr>
+          <p:cNvPr id="27" name="Text 25"/>
+          <p:cNvSpPr/>
+          <p:nvPr/>
+        </p:nvSpPr>
+        <p:spPr>
+          <a:xfrm>
+            <a:off x="7223760" y="2560320"/>
+            <a:ext cx="1280160" cy="502920"/>
+          </a:xfrm>
+          <a:prstGeom prst="rect">
+            <a:avLst/>
+          </a:prstGeom>
+          <a:noFill/>
+          <a:ln/>
+        </p:spPr>
+        <p:txBody>
+          <a:bodyPr wrap="square" lIns="0" tIns="0" rIns="0" bIns="0" rtlCol="0" anchor="ctr"/>
+          <a:lstStyle/>
+          <a:p>
+            <a:pPr marL="0" indent="0" algn="ctr">
+              <a:buNone/>
+            </a:pPr>
+            <a:r>
+              <a:rPr lang="en-US" sz="1300" dirty="0">
+                <a:solidFill>
+                  <a:srgbClr val="1A1F2E"/>
+                </a:solidFill>
+                <a:latin typeface="Consolas" pitchFamily="34" charset="0"/>
+                <a:ea typeface="Consolas" pitchFamily="34" charset="-122"/>
+                <a:cs typeface="Consolas" pitchFamily="34" charset="-120"/>
+              </a:rPr>
+              <a:t>0.361</a:t>
+            </a:r>
+            <a:endParaRPr lang="en-US" sz="1300" dirty="0"/>
+          </a:p>
+        </p:txBody>
+      </p:sp>
+      <p:sp>
+        <p:nvSpPr>
+          <p:cNvPr id="28" name="Shape 26"/>
+          <p:cNvSpPr/>
+          <p:nvPr/>
+        </p:nvSpPr>
+        <p:spPr>
+          <a:xfrm>
+            <a:off x="8503920" y="2560320"/>
+            <a:ext cx="1280160" cy="502920"/>
+          </a:xfrm>
+          <a:prstGeom prst="rect">
+            <a:avLst/>
+          </a:prstGeom>
+          <a:solidFill>
+            <a:srgbClr val="F7F9FB"/>
+          </a:solidFill>
+          <a:ln w="6350">
+            <a:solidFill>
+              <a:srgbClr val="D0D5DD"/>
+            </a:solidFill>
+            <a:prstDash val="solid"/>
+          </a:ln>
+        </p:spPr>
+        <p:txBody>
+          <a:bodyPr/>
+          <a:lstStyle/>
+          <a:p>
+            <a:endParaRPr lang="en-US"/>
+          </a:p>
+        </p:txBody>
+      </p:sp>
+      <p:sp>
+        <p:nvSpPr>
+          <p:cNvPr id="29" name="Text 27"/>
+          <p:cNvSpPr/>
+          <p:nvPr/>
+        </p:nvSpPr>
+        <p:spPr>
+          <a:xfrm>
+            <a:off x="8503920" y="2560320"/>
+            <a:ext cx="1280160" cy="502920"/>
+          </a:xfrm>
+          <a:prstGeom prst="rect">
+            <a:avLst/>
+          </a:prstGeom>
+          <a:noFill/>
+          <a:ln/>
+        </p:spPr>
+        <p:txBody>
+          <a:bodyPr wrap="square" lIns="0" tIns="0" rIns="0" bIns="0" rtlCol="0" anchor="ctr"/>
+          <a:lstStyle/>
+          <a:p>
+            <a:pPr marL="0" indent="0" algn="ctr">
+              <a:buNone/>
+            </a:pPr>
+            <a:r>
+              <a:rPr lang="en-US" sz="1300" dirty="0">
+                <a:solidFill>
+                  <a:srgbClr val="1A1F2E"/>
+                </a:solidFill>
+                <a:latin typeface="Consolas" pitchFamily="34" charset="0"/>
+                <a:ea typeface="Consolas" pitchFamily="34" charset="-122"/>
+                <a:cs typeface="Consolas" pitchFamily="34" charset="-120"/>
+              </a:rPr>
+              <a:t>0.483</a:t>
+            </a:r>
+            <a:endParaRPr lang="en-US" sz="1300" dirty="0"/>
+          </a:p>
+        </p:txBody>
+      </p:sp>
+      <p:sp>
+        <p:nvSpPr>
+          <p:cNvPr id="30" name="Shape 28"/>
+          <p:cNvSpPr/>
+          <p:nvPr/>
+        </p:nvSpPr>
+        <p:spPr>
+          <a:xfrm>
+            <a:off x="9784080" y="2560320"/>
+            <a:ext cx="1371600" cy="502920"/>
+          </a:xfrm>
+          <a:prstGeom prst="rect">
+            <a:avLst/>
+          </a:prstGeom>
+          <a:solidFill>
+            <a:srgbClr val="F7F9FB"/>
+          </a:solidFill>
+          <a:ln w="6350">
+            <a:solidFill>
+              <a:srgbClr val="D0D5DD"/>
+            </a:solidFill>
+            <a:prstDash val="solid"/>
+          </a:ln>
+        </p:spPr>
+        <p:txBody>
+          <a:bodyPr/>
+          <a:lstStyle/>
+          <a:p>
+            <a:endParaRPr lang="en-US"/>
+          </a:p>
+        </p:txBody>
+      </p:sp>
+      <p:sp>
+        <p:nvSpPr>
+          <p:cNvPr id="31" name="Text 29"/>
+          <p:cNvSpPr/>
+          <p:nvPr/>
+        </p:nvSpPr>
+        <p:spPr>
+          <a:xfrm>
+            <a:off x="9784080" y="2560320"/>
+            <a:ext cx="1371600" cy="502920"/>
+          </a:xfrm>
+          <a:prstGeom prst="rect">
+            <a:avLst/>
+          </a:prstGeom>
+          <a:noFill/>
+          <a:ln/>
+        </p:spPr>
+        <p:txBody>
+          <a:bodyPr wrap="square" lIns="0" tIns="0" rIns="0" bIns="0" rtlCol="0" anchor="ctr"/>
+          <a:lstStyle/>
+          <a:p>
+            <a:pPr marL="0" indent="0" algn="ctr">
+              <a:buNone/>
+            </a:pPr>
+            <a:r>
+              <a:rPr lang="en-US" sz="1300" dirty="0">
+                <a:solidFill>
+                  <a:srgbClr val="1A1F2E"/>
+                </a:solidFill>
+                <a:latin typeface="Consolas" pitchFamily="34" charset="0"/>
+                <a:ea typeface="Consolas" pitchFamily="34" charset="-122"/>
+                <a:cs typeface="Consolas" pitchFamily="34" charset="-120"/>
+              </a:rPr>
+              <a:t>0.820</a:t>
+            </a:r>
+            <a:endParaRPr lang="en-US" sz="1300" dirty="0"/>
           </a:p>
         </p:txBody>
       </p:sp>
